--- a/Factory_to_Customer_Shipping_Route_Efficiency_Analysis/Dataset/Nassau Candy Industries - Factory to Customer Shipping Route Efficiency Analysis.pptx
+++ b/Factory_to_Customer_Shipping_Route_Efficiency_Analysis/Dataset/Nassau Candy Industries - Factory to Customer Shipping Route Efficiency Analysis.pptx
@@ -5,15 +5,16 @@
     <p:sldMasterId id="2147483648" r:id="rId1"/>
   </p:sldMasterIdLst>
   <p:sldIdLst>
-    <p:sldId id="271" r:id="rId2"/>
-    <p:sldId id="257" r:id="rId3"/>
-    <p:sldId id="258" r:id="rId4"/>
-    <p:sldId id="259" r:id="rId5"/>
-    <p:sldId id="264" r:id="rId6"/>
-    <p:sldId id="260" r:id="rId7"/>
-    <p:sldId id="261" r:id="rId8"/>
-    <p:sldId id="263" r:id="rId9"/>
-    <p:sldId id="272" r:id="rId10"/>
+    <p:sldId id="273" r:id="rId2"/>
+    <p:sldId id="271" r:id="rId3"/>
+    <p:sldId id="257" r:id="rId4"/>
+    <p:sldId id="258" r:id="rId5"/>
+    <p:sldId id="259" r:id="rId6"/>
+    <p:sldId id="264" r:id="rId7"/>
+    <p:sldId id="260" r:id="rId8"/>
+    <p:sldId id="261" r:id="rId9"/>
+    <p:sldId id="263" r:id="rId10"/>
+    <p:sldId id="272" r:id="rId11"/>
   </p:sldIdLst>
   <p:sldSz cx="12192000" cy="6858000"/>
   <p:notesSz cx="6858000" cy="9144000"/>
@@ -3334,6 +3335,174 @@
           <a:chExt cx="0" cy="0"/>
         </a:xfrm>
       </p:grpSpPr>
+      <p:sp>
+        <p:nvSpPr>
+          <p:cNvPr id="4" name="TextBox 3">
+            <a:extLst>
+              <a:ext uri="{FF2B5EF4-FFF2-40B4-BE49-F238E27FC236}">
+                <a16:creationId xmlns:a16="http://schemas.microsoft.com/office/drawing/2014/main" id="{D2763886-8F75-6A5F-CFCE-3EE7D937E2CE}"/>
+              </a:ext>
+            </a:extLst>
+          </p:cNvPr>
+          <p:cNvSpPr txBox="1"/>
+          <p:nvPr/>
+        </p:nvSpPr>
+        <p:spPr>
+          <a:xfrm>
+            <a:off x="353683" y="1224951"/>
+            <a:ext cx="9264770" cy="1754326"/>
+          </a:xfrm>
+          <a:prstGeom prst="rect">
+            <a:avLst/>
+          </a:prstGeom>
+          <a:noFill/>
+        </p:spPr>
+        <p:txBody>
+          <a:bodyPr wrap="square" rtlCol="0">
+            <a:spAutoFit/>
+          </a:bodyPr>
+          <a:lstStyle/>
+          <a:p>
+            <a:r>
+              <a:rPr lang="en-US" sz="5400" b="1" dirty="0"/>
+              <a:t>FACTORY TO CUSTOMER SHIPPING ROUTE ANALYSIS</a:t>
+            </a:r>
+            <a:endParaRPr lang="en-IN" sz="5400" b="1" dirty="0"/>
+          </a:p>
+        </p:txBody>
+      </p:sp>
+      <p:sp>
+        <p:nvSpPr>
+          <p:cNvPr id="5" name="TextBox 4">
+            <a:extLst>
+              <a:ext uri="{FF2B5EF4-FFF2-40B4-BE49-F238E27FC236}">
+                <a16:creationId xmlns:a16="http://schemas.microsoft.com/office/drawing/2014/main" id="{4FDF9BA8-5C9C-E2E8-3126-81732B353613}"/>
+              </a:ext>
+            </a:extLst>
+          </p:cNvPr>
+          <p:cNvSpPr txBox="1"/>
+          <p:nvPr/>
+        </p:nvSpPr>
+        <p:spPr>
+          <a:xfrm>
+            <a:off x="69011" y="6334780"/>
+            <a:ext cx="4718650" cy="523220"/>
+          </a:xfrm>
+          <a:prstGeom prst="rect">
+            <a:avLst/>
+          </a:prstGeom>
+          <a:noFill/>
+        </p:spPr>
+        <p:txBody>
+          <a:bodyPr wrap="square" rtlCol="0">
+            <a:spAutoFit/>
+          </a:bodyPr>
+          <a:lstStyle/>
+          <a:p>
+            <a:r>
+              <a:rPr lang="en-US" sz="1400" b="1" dirty="0"/>
+              <a:t>BISWAJEET PRADHAN</a:t>
+            </a:r>
+          </a:p>
+          <a:p>
+            <a:r>
+              <a:rPr lang="en-US" sz="1400" b="1" dirty="0"/>
+              <a:t>biswajeetpradhan36933@gmail.com</a:t>
+            </a:r>
+            <a:endParaRPr lang="en-IN" sz="1400" b="1" dirty="0"/>
+          </a:p>
+        </p:txBody>
+      </p:sp>
+    </p:spTree>
+    <p:extLst>
+      <p:ext uri="{BB962C8B-B14F-4D97-AF65-F5344CB8AC3E}">
+        <p14:creationId xmlns:p14="http://schemas.microsoft.com/office/powerpoint/2010/main" val="1889860861"/>
+      </p:ext>
+    </p:extLst>
+  </p:cSld>
+  <p:clrMapOvr>
+    <a:masterClrMapping/>
+  </p:clrMapOvr>
+</p:sld>
+</file>
+
+<file path=ppt/slides/slide10.xml><?xml version="1.0" encoding="utf-8"?>
+<p:sld xmlns:a="http://schemas.openxmlformats.org/drawingml/2006/main" xmlns:r="http://schemas.openxmlformats.org/officeDocument/2006/relationships" xmlns:p="http://schemas.openxmlformats.org/presentationml/2006/main">
+  <p:cSld>
+    <p:spTree>
+      <p:nvGrpSpPr>
+        <p:cNvPr id="1" name=""/>
+        <p:cNvGrpSpPr/>
+        <p:nvPr/>
+      </p:nvGrpSpPr>
+      <p:grpSpPr>
+        <a:xfrm>
+          <a:off x="0" y="0"/>
+          <a:ext cx="0" cy="0"/>
+          <a:chOff x="0" y="0"/>
+          <a:chExt cx="0" cy="0"/>
+        </a:xfrm>
+      </p:grpSpPr>
+      <p:pic>
+        <p:nvPicPr>
+          <p:cNvPr id="5" name="Picture 4">
+            <a:extLst>
+              <a:ext uri="{FF2B5EF4-FFF2-40B4-BE49-F238E27FC236}">
+                <a16:creationId xmlns:a16="http://schemas.microsoft.com/office/drawing/2014/main" id="{895F1BBD-B078-DE0F-8C12-48E678DE3B24}"/>
+              </a:ext>
+            </a:extLst>
+          </p:cNvPr>
+          <p:cNvPicPr>
+            <a:picLocks noChangeAspect="1"/>
+          </p:cNvPicPr>
+          <p:nvPr/>
+        </p:nvPicPr>
+        <p:blipFill>
+          <a:blip r:embed="rId2"/>
+          <a:stretch>
+            <a:fillRect/>
+          </a:stretch>
+        </p:blipFill>
+        <p:spPr>
+          <a:xfrm>
+            <a:off x="0" y="139653"/>
+            <a:ext cx="12192000" cy="6578693"/>
+          </a:xfrm>
+          <a:prstGeom prst="rect">
+            <a:avLst/>
+          </a:prstGeom>
+        </p:spPr>
+      </p:pic>
+    </p:spTree>
+    <p:extLst>
+      <p:ext uri="{BB962C8B-B14F-4D97-AF65-F5344CB8AC3E}">
+        <p14:creationId xmlns:p14="http://schemas.microsoft.com/office/powerpoint/2010/main" val="2145724787"/>
+      </p:ext>
+    </p:extLst>
+  </p:cSld>
+  <p:clrMapOvr>
+    <a:masterClrMapping/>
+  </p:clrMapOvr>
+</p:sld>
+</file>
+
+<file path=ppt/slides/slide2.xml><?xml version="1.0" encoding="utf-8"?>
+<p:sld xmlns:a="http://schemas.openxmlformats.org/drawingml/2006/main" xmlns:r="http://schemas.openxmlformats.org/officeDocument/2006/relationships" xmlns:p="http://schemas.openxmlformats.org/presentationml/2006/main">
+  <p:cSld>
+    <p:spTree>
+      <p:nvGrpSpPr>
+        <p:cNvPr id="1" name=""/>
+        <p:cNvGrpSpPr/>
+        <p:nvPr/>
+      </p:nvGrpSpPr>
+      <p:grpSpPr>
+        <a:xfrm>
+          <a:off x="0" y="0"/>
+          <a:ext cx="0" cy="0"/>
+          <a:chOff x="0" y="0"/>
+          <a:chExt cx="0" cy="0"/>
+        </a:xfrm>
+      </p:grpSpPr>
       <p:pic>
         <p:nvPicPr>
           <p:cNvPr id="6" name="Picture 5">
@@ -3436,7 +3605,7 @@
 </p:sld>
 </file>
 
-<file path=ppt/slides/slide2.xml><?xml version="1.0" encoding="utf-8"?>
+<file path=ppt/slides/slide3.xml><?xml version="1.0" encoding="utf-8"?>
 <p:sld xmlns:a="http://schemas.openxmlformats.org/drawingml/2006/main" xmlns:r="http://schemas.openxmlformats.org/officeDocument/2006/relationships" xmlns:p="http://schemas.openxmlformats.org/presentationml/2006/main">
   <p:cSld>
     <p:spTree>
@@ -3477,65 +3646,6 @@
           <a:xfrm>
             <a:off x="0" y="140158"/>
             <a:ext cx="12192000" cy="6577683"/>
-          </a:xfrm>
-          <a:prstGeom prst="rect">
-            <a:avLst/>
-          </a:prstGeom>
-        </p:spPr>
-      </p:pic>
-    </p:spTree>
-    <p:extLst>
-      <p:ext uri="{BB962C8B-B14F-4D97-AF65-F5344CB8AC3E}">
-        <p14:creationId xmlns:p14="http://schemas.microsoft.com/office/powerpoint/2010/main" val="95992585"/>
-      </p:ext>
-    </p:extLst>
-  </p:cSld>
-  <p:clrMapOvr>
-    <a:masterClrMapping/>
-  </p:clrMapOvr>
-</p:sld>
-</file>
-
-<file path=ppt/slides/slide3.xml><?xml version="1.0" encoding="utf-8"?>
-<p:sld xmlns:a="http://schemas.openxmlformats.org/drawingml/2006/main" xmlns:r="http://schemas.openxmlformats.org/officeDocument/2006/relationships" xmlns:p="http://schemas.openxmlformats.org/presentationml/2006/main">
-  <p:cSld>
-    <p:spTree>
-      <p:nvGrpSpPr>
-        <p:cNvPr id="1" name=""/>
-        <p:cNvGrpSpPr/>
-        <p:nvPr/>
-      </p:nvGrpSpPr>
-      <p:grpSpPr>
-        <a:xfrm>
-          <a:off x="0" y="0"/>
-          <a:ext cx="0" cy="0"/>
-          <a:chOff x="0" y="0"/>
-          <a:chExt cx="0" cy="0"/>
-        </a:xfrm>
-      </p:grpSpPr>
-      <p:pic>
-        <p:nvPicPr>
-          <p:cNvPr id="5" name="Picture 4">
-            <a:extLst>
-              <a:ext uri="{FF2B5EF4-FFF2-40B4-BE49-F238E27FC236}">
-                <a16:creationId xmlns:a16="http://schemas.microsoft.com/office/drawing/2014/main" id="{2882CB76-7D93-2EC7-AF99-E4BA9A7B0960}"/>
-              </a:ext>
-            </a:extLst>
-          </p:cNvPr>
-          <p:cNvPicPr>
-            <a:picLocks noChangeAspect="1"/>
-          </p:cNvPicPr>
-          <p:nvPr/>
-        </p:nvPicPr>
-        <p:blipFill>
-          <a:blip r:embed="rId2"/>
-          <a:srcRect t="1108"/>
-          <a:stretch/>
-        </p:blipFill>
-        <p:spPr>
-          <a:xfrm>
-            <a:off x="376687" y="0"/>
-            <a:ext cx="11438626" cy="6861543"/>
           </a:xfrm>
           <a:prstGeom prst="rect">
             <a:avLst/>
@@ -3574,10 +3684,10 @@
       </p:grpSpPr>
       <p:pic>
         <p:nvPicPr>
-          <p:cNvPr id="6" name="Picture 5">
-            <a:extLst>
-              <a:ext uri="{FF2B5EF4-FFF2-40B4-BE49-F238E27FC236}">
-                <a16:creationId xmlns:a16="http://schemas.microsoft.com/office/drawing/2014/main" id="{C30DBA4F-8192-DCAF-C83A-E65C35C83836}"/>
+          <p:cNvPr id="5" name="Picture 4">
+            <a:extLst>
+              <a:ext uri="{FF2B5EF4-FFF2-40B4-BE49-F238E27FC236}">
+                <a16:creationId xmlns:a16="http://schemas.microsoft.com/office/drawing/2014/main" id="{2882CB76-7D93-2EC7-AF99-E4BA9A7B0960}"/>
               </a:ext>
             </a:extLst>
           </p:cNvPr>
@@ -3588,14 +3698,13 @@
         </p:nvPicPr>
         <p:blipFill>
           <a:blip r:embed="rId2"/>
-          <a:stretch>
-            <a:fillRect/>
-          </a:stretch>
+          <a:srcRect t="1108"/>
+          <a:stretch/>
         </p:blipFill>
         <p:spPr>
           <a:xfrm>
-            <a:off x="0" y="96905"/>
-            <a:ext cx="12192000" cy="6664189"/>
+            <a:off x="376687" y="0"/>
+            <a:ext cx="11438626" cy="6861543"/>
           </a:xfrm>
           <a:prstGeom prst="rect">
             <a:avLst/>
@@ -3634,10 +3743,10 @@
       </p:grpSpPr>
       <p:pic>
         <p:nvPicPr>
-          <p:cNvPr id="5" name="Picture 4">
-            <a:extLst>
-              <a:ext uri="{FF2B5EF4-FFF2-40B4-BE49-F238E27FC236}">
-                <a16:creationId xmlns:a16="http://schemas.microsoft.com/office/drawing/2014/main" id="{5C95ED74-1B06-9BE9-3659-314BAA37670D}"/>
+          <p:cNvPr id="6" name="Picture 5">
+            <a:extLst>
+              <a:ext uri="{FF2B5EF4-FFF2-40B4-BE49-F238E27FC236}">
+                <a16:creationId xmlns:a16="http://schemas.microsoft.com/office/drawing/2014/main" id="{C30DBA4F-8192-DCAF-C83A-E65C35C83836}"/>
               </a:ext>
             </a:extLst>
           </p:cNvPr>
@@ -3654,8 +3763,8 @@
         </p:blipFill>
         <p:spPr>
           <a:xfrm>
-            <a:off x="0" y="139653"/>
-            <a:ext cx="12192000" cy="6578693"/>
+            <a:off x="0" y="96905"/>
+            <a:ext cx="12192000" cy="6664189"/>
           </a:xfrm>
           <a:prstGeom prst="rect">
             <a:avLst/>
@@ -3694,10 +3803,10 @@
       </p:grpSpPr>
       <p:pic>
         <p:nvPicPr>
-          <p:cNvPr id="3" name="Picture 2">
-            <a:extLst>
-              <a:ext uri="{FF2B5EF4-FFF2-40B4-BE49-F238E27FC236}">
-                <a16:creationId xmlns:a16="http://schemas.microsoft.com/office/drawing/2014/main" id="{2B87F3EC-BEB6-9984-7DF0-C5B5F78E353D}"/>
+          <p:cNvPr id="5" name="Picture 4">
+            <a:extLst>
+              <a:ext uri="{FF2B5EF4-FFF2-40B4-BE49-F238E27FC236}">
+                <a16:creationId xmlns:a16="http://schemas.microsoft.com/office/drawing/2014/main" id="{5C95ED74-1B06-9BE9-3659-314BAA37670D}"/>
               </a:ext>
             </a:extLst>
           </p:cNvPr>
@@ -3714,68 +3823,8 @@
         </p:blipFill>
         <p:spPr>
           <a:xfrm>
-            <a:off x="203816" y="0"/>
-            <a:ext cx="4124112" cy="6858000"/>
-          </a:xfrm>
-          <a:prstGeom prst="rect">
-            <a:avLst/>
-          </a:prstGeom>
-        </p:spPr>
-      </p:pic>
-      <p:pic>
-        <p:nvPicPr>
-          <p:cNvPr id="6" name="Picture 5">
-            <a:extLst>
-              <a:ext uri="{FF2B5EF4-FFF2-40B4-BE49-F238E27FC236}">
-                <a16:creationId xmlns:a16="http://schemas.microsoft.com/office/drawing/2014/main" id="{5CA50205-F0C7-9620-3E9F-55C17BEEBFA7}"/>
-              </a:ext>
-            </a:extLst>
-          </p:cNvPr>
-          <p:cNvPicPr>
-            <a:picLocks noChangeAspect="1"/>
-          </p:cNvPicPr>
-          <p:nvPr/>
-        </p:nvPicPr>
-        <p:blipFill>
-          <a:blip r:embed="rId3"/>
-          <a:stretch>
-            <a:fillRect/>
-          </a:stretch>
-        </p:blipFill>
-        <p:spPr>
-          <a:xfrm>
-            <a:off x="4766899" y="0"/>
-            <a:ext cx="2916314" cy="6858000"/>
-          </a:xfrm>
-          <a:prstGeom prst="rect">
-            <a:avLst/>
-          </a:prstGeom>
-        </p:spPr>
-      </p:pic>
-      <p:pic>
-        <p:nvPicPr>
-          <p:cNvPr id="9" name="Picture 8">
-            <a:extLst>
-              <a:ext uri="{FF2B5EF4-FFF2-40B4-BE49-F238E27FC236}">
-                <a16:creationId xmlns:a16="http://schemas.microsoft.com/office/drawing/2014/main" id="{176AE5FC-5E90-8DEB-A148-4FF202FD4896}"/>
-              </a:ext>
-            </a:extLst>
-          </p:cNvPr>
-          <p:cNvPicPr>
-            <a:picLocks noChangeAspect="1"/>
-          </p:cNvPicPr>
-          <p:nvPr/>
-        </p:nvPicPr>
-        <p:blipFill>
-          <a:blip r:embed="rId4"/>
-          <a:stretch>
-            <a:fillRect/>
-          </a:stretch>
-        </p:blipFill>
-        <p:spPr>
-          <a:xfrm>
-            <a:off x="8254842" y="0"/>
-            <a:ext cx="3239055" cy="6858000"/>
+            <a:off x="0" y="139653"/>
+            <a:ext cx="12192000" cy="6578693"/>
           </a:xfrm>
           <a:prstGeom prst="rect">
             <a:avLst/>
@@ -3817,7 +3866,7 @@
           <p:cNvPr id="3" name="Picture 2">
             <a:extLst>
               <a:ext uri="{FF2B5EF4-FFF2-40B4-BE49-F238E27FC236}">
-                <a16:creationId xmlns:a16="http://schemas.microsoft.com/office/drawing/2014/main" id="{2BE12FC8-8C96-730A-604A-AC56339A1AC0}"/>
+                <a16:creationId xmlns:a16="http://schemas.microsoft.com/office/drawing/2014/main" id="{2B87F3EC-BEB6-9984-7DF0-C5B5F78E353D}"/>
               </a:ext>
             </a:extLst>
           </p:cNvPr>
@@ -3834,8 +3883,68 @@
         </p:blipFill>
         <p:spPr>
           <a:xfrm>
-            <a:off x="0" y="117277"/>
-            <a:ext cx="12192000" cy="6623446"/>
+            <a:off x="203816" y="0"/>
+            <a:ext cx="4124112" cy="6858000"/>
+          </a:xfrm>
+          <a:prstGeom prst="rect">
+            <a:avLst/>
+          </a:prstGeom>
+        </p:spPr>
+      </p:pic>
+      <p:pic>
+        <p:nvPicPr>
+          <p:cNvPr id="6" name="Picture 5">
+            <a:extLst>
+              <a:ext uri="{FF2B5EF4-FFF2-40B4-BE49-F238E27FC236}">
+                <a16:creationId xmlns:a16="http://schemas.microsoft.com/office/drawing/2014/main" id="{5CA50205-F0C7-9620-3E9F-55C17BEEBFA7}"/>
+              </a:ext>
+            </a:extLst>
+          </p:cNvPr>
+          <p:cNvPicPr>
+            <a:picLocks noChangeAspect="1"/>
+          </p:cNvPicPr>
+          <p:nvPr/>
+        </p:nvPicPr>
+        <p:blipFill>
+          <a:blip r:embed="rId3"/>
+          <a:stretch>
+            <a:fillRect/>
+          </a:stretch>
+        </p:blipFill>
+        <p:spPr>
+          <a:xfrm>
+            <a:off x="4766899" y="0"/>
+            <a:ext cx="2916314" cy="6858000"/>
+          </a:xfrm>
+          <a:prstGeom prst="rect">
+            <a:avLst/>
+          </a:prstGeom>
+        </p:spPr>
+      </p:pic>
+      <p:pic>
+        <p:nvPicPr>
+          <p:cNvPr id="9" name="Picture 8">
+            <a:extLst>
+              <a:ext uri="{FF2B5EF4-FFF2-40B4-BE49-F238E27FC236}">
+                <a16:creationId xmlns:a16="http://schemas.microsoft.com/office/drawing/2014/main" id="{176AE5FC-5E90-8DEB-A148-4FF202FD4896}"/>
+              </a:ext>
+            </a:extLst>
+          </p:cNvPr>
+          <p:cNvPicPr>
+            <a:picLocks noChangeAspect="1"/>
+          </p:cNvPicPr>
+          <p:nvPr/>
+        </p:nvPicPr>
+        <p:blipFill>
+          <a:blip r:embed="rId4"/>
+          <a:stretch>
+            <a:fillRect/>
+          </a:stretch>
+        </p:blipFill>
+        <p:spPr>
+          <a:xfrm>
+            <a:off x="8254842" y="0"/>
+            <a:ext cx="3239055" cy="6858000"/>
           </a:xfrm>
           <a:prstGeom prst="rect">
             <a:avLst/>
@@ -3874,10 +3983,10 @@
       </p:grpSpPr>
       <p:pic>
         <p:nvPicPr>
-          <p:cNvPr id="7" name="Picture 6">
-            <a:extLst>
-              <a:ext uri="{FF2B5EF4-FFF2-40B4-BE49-F238E27FC236}">
-                <a16:creationId xmlns:a16="http://schemas.microsoft.com/office/drawing/2014/main" id="{16C8E2EF-C7F0-F8AE-CB88-5559BEEACE95}"/>
+          <p:cNvPr id="3" name="Picture 2">
+            <a:extLst>
+              <a:ext uri="{FF2B5EF4-FFF2-40B4-BE49-F238E27FC236}">
+                <a16:creationId xmlns:a16="http://schemas.microsoft.com/office/drawing/2014/main" id="{2BE12FC8-8C96-730A-604A-AC56339A1AC0}"/>
               </a:ext>
             </a:extLst>
           </p:cNvPr>
@@ -3894,8 +4003,8 @@
         </p:blipFill>
         <p:spPr>
           <a:xfrm>
-            <a:off x="0" y="154157"/>
-            <a:ext cx="12192000" cy="6549686"/>
+            <a:off x="0" y="117277"/>
+            <a:ext cx="12192000" cy="6623446"/>
           </a:xfrm>
           <a:prstGeom prst="rect">
             <a:avLst/>
@@ -3934,10 +4043,10 @@
       </p:grpSpPr>
       <p:pic>
         <p:nvPicPr>
-          <p:cNvPr id="5" name="Picture 4">
-            <a:extLst>
-              <a:ext uri="{FF2B5EF4-FFF2-40B4-BE49-F238E27FC236}">
-                <a16:creationId xmlns:a16="http://schemas.microsoft.com/office/drawing/2014/main" id="{895F1BBD-B078-DE0F-8C12-48E678DE3B24}"/>
+          <p:cNvPr id="7" name="Picture 6">
+            <a:extLst>
+              <a:ext uri="{FF2B5EF4-FFF2-40B4-BE49-F238E27FC236}">
+                <a16:creationId xmlns:a16="http://schemas.microsoft.com/office/drawing/2014/main" id="{16C8E2EF-C7F0-F8AE-CB88-5559BEEACE95}"/>
               </a:ext>
             </a:extLst>
           </p:cNvPr>
@@ -3954,8 +4063,8 @@
         </p:blipFill>
         <p:spPr>
           <a:xfrm>
-            <a:off x="0" y="139653"/>
-            <a:ext cx="12192000" cy="6578693"/>
+            <a:off x="0" y="154157"/>
+            <a:ext cx="12192000" cy="6549686"/>
           </a:xfrm>
           <a:prstGeom prst="rect">
             <a:avLst/>
@@ -3965,7 +4074,7 @@
     </p:spTree>
     <p:extLst>
       <p:ext uri="{BB962C8B-B14F-4D97-AF65-F5344CB8AC3E}">
-        <p14:creationId xmlns:p14="http://schemas.microsoft.com/office/powerpoint/2010/main" val="2145724787"/>
+        <p14:creationId xmlns:p14="http://schemas.microsoft.com/office/powerpoint/2010/main" val="95992585"/>
       </p:ext>
     </p:extLst>
   </p:cSld>
